--- a/docs/สไลด์นำเสนอ-ใบเสร็จดี.pptx
+++ b/docs/สไลด์นำเสนอ-ใบเสร็จดี.pptx
@@ -8852,7 +8852,7 @@
                 </a:solidFill>
                 <a:latin typeface="Noto Sans Thai"/>
               </a:rPr>
-              <a:t>●  ใช้โมเดลแบบ quantized เพื่อให้เหมาะกับ RAM 4 GB</a:t>
+              <a:t>●  ใช้โมเดลแบบ quantized เพื่อลดภาระ CPU และหน่วยความจำ</a:t>
             </a:r>
           </a:p>
         </p:txBody>
